--- a/docs/syllabus/cen429-izlence-sunum.tr.pptx
+++ b/docs/syllabus/cen429-izlence-sunum.tr.pptx
@@ -7428,7 +7428,7 @@
         <p:spPr>
           <a:xfrm>
             <a:off x="640080" y="1325880"/>
-            <a:ext cx="10911535" cy="2631440"/>
+            <a:ext cx="10911535" cy="2961640"/>
           </a:xfrm>
           <a:prstGeom prst="rect">
             <a:avLst/>
@@ -7617,7 +7617,7 @@
                   <a:srgbClr val="1F2D3A"/>
                 </a:solidFill>
               </a:rPr>
-              <a:t> klasörlerinde, her biri </a:t>
+              <a:t> klasörlerinde; </a:t>
             </a:r>
             <a:r>
               <a:rPr sz="2000" b="0">
@@ -7626,7 +7626,49 @@
                 </a:solidFill>
                 <a:latin typeface="Consolas"/>
               </a:rPr>
-              <a:t>make demo</a:t>
+              <a:t>code</a:t>
+            </a:r>
+            <a:r>
+              <a:rPr sz="2000" b="0">
+                <a:solidFill>
+                  <a:srgbClr val="1F2D3A"/>
+                </a:solidFill>
+              </a:rPr>
+              <a:t> içinde bir kez derleyin, sonra </a:t>
+            </a:r>
+            <a:r>
+              <a:rPr sz="2000" b="0">
+                <a:solidFill>
+                  <a:srgbClr val="A1123F"/>
+                </a:solidFill>
+                <a:latin typeface="Consolas"/>
+              </a:rPr>
+              <a:t>demo.ps1</a:t>
+            </a:r>
+            <a:r>
+              <a:rPr sz="2000" b="0">
+                <a:solidFill>
+                  <a:srgbClr val="1F2D3A"/>
+                </a:solidFill>
+              </a:rPr>
+              <a:t> (Windows) ya da </a:t>
+            </a:r>
+            <a:r>
+              <a:rPr sz="2000" b="0">
+                <a:solidFill>
+                  <a:srgbClr val="A1123F"/>
+                </a:solidFill>
+                <a:latin typeface="Consolas"/>
+              </a:rPr>
+              <a:t>demo.sh</a:t>
+            </a:r>
+            <a:r>
+              <a:rPr sz="2000" b="0">
+                <a:solidFill>
+                  <a:srgbClr val="1F2D3A"/>
+                </a:solidFill>
+              </a:rPr>
+              <a:t> (WSL/Linux)</a:t>
             </a:r>
           </a:p>
         </p:txBody>

--- a/docs/syllabus/cen429-izlence-sunum.tr.pptx
+++ b/docs/syllabus/cen429-izlence-sunum.tr.pptx
@@ -4339,7 +4339,7 @@
                   <a:srgbClr val="1F2D3A"/>
                 </a:solidFill>
               </a:rPr>
-              <a:t>: veri güvenliği ve kriptografi, C/C++ ve Java sağlamlaştırma,</a:t>
+              <a:t>: veri güvenliği ve kriptografi, C/C++ ve Java sağlamlaştırma (hardening),</a:t>
             </a:r>
           </a:p>
         </p:txBody>
